--- a/tests/OfficeAgent.Tests/Corpus/v1.0.0/native/inputs/p-fill.pptx
+++ b/tests/OfficeAgent.Tests/Corpus/v1.0.0/native/inputs/p-fill.pptx
@@ -2,10 +2,10 @@
 <file path=ppt/presentation.xml><?xml version="1.0" encoding="utf-8"?>
 <p:presentation xmlns:r="http://schemas.openxmlformats.org/officeDocument/2006/relationships" xmlns:p="http://schemas.openxmlformats.org/presentationml/2006/main">
   <p:sldMasterIdLst>
-    <p:sldMasterId xmlns:r="http://schemas.openxmlformats.org/officeDocument/2006/relationships" id="2147483648" r:id="R9203e60005e240a1"/>
+    <p:sldMasterId xmlns:r="http://schemas.openxmlformats.org/officeDocument/2006/relationships" id="2147483648" r:id="Re5c4962a5193466e"/>
   </p:sldMasterIdLst>
   <p:sldIdLst>
-    <p:sldId xmlns:r="http://schemas.openxmlformats.org/officeDocument/2006/relationships" id="256" r:id="R015678e9a5c34cef"/>
+    <p:sldId xmlns:r="http://schemas.openxmlformats.org/officeDocument/2006/relationships" id="256" r:id="Rb25982c38edd4f53"/>
   </p:sldIdLst>
   <p:sldSz cx="12192000" cy="6858000"/>
   <p:notesSz cx="6858000" cy="9144000"/>
@@ -386,11 +386,11 @@
   </p:cSld>
   <p:clrMap bg1="lt1" tx1="dk1" bg2="lt2" tx2="dk2" accent1="accent1" accent2="accent2" accent3="accent3" accent4="accent4" accent5="accent5" accent6="accent6" hlink="hlink" folHlink="folHlink"/>
   <p:sldLayoutIdLst>
-    <p:sldLayoutId xmlns:r="http://schemas.openxmlformats.org/officeDocument/2006/relationships" id="2147483649" r:id="Rba4a3300607044ab"/>
-    <p:sldLayoutId xmlns:r="http://schemas.openxmlformats.org/officeDocument/2006/relationships" id="2147483650" r:id="R0bf3857f3d6541bb"/>
-    <p:sldLayoutId xmlns:r="http://schemas.openxmlformats.org/officeDocument/2006/relationships" id="2147483651" r:id="R2974eb97ac854bbd"/>
-    <p:sldLayoutId xmlns:r="http://schemas.openxmlformats.org/officeDocument/2006/relationships" id="2147483652" r:id="Ra27048de9e3f4d52"/>
-    <p:sldLayoutId xmlns:r="http://schemas.openxmlformats.org/officeDocument/2006/relationships" id="2147483653" r:id="R6447e579dd8f4ba0"/>
+    <p:sldLayoutId xmlns:r="http://schemas.openxmlformats.org/officeDocument/2006/relationships" id="2147483649" r:id="R97af01140d34447e"/>
+    <p:sldLayoutId xmlns:r="http://schemas.openxmlformats.org/officeDocument/2006/relationships" id="2147483650" r:id="R2374b71be84949ba"/>
+    <p:sldLayoutId xmlns:r="http://schemas.openxmlformats.org/officeDocument/2006/relationships" id="2147483651" r:id="R9b8aed1908754c61"/>
+    <p:sldLayoutId xmlns:r="http://schemas.openxmlformats.org/officeDocument/2006/relationships" id="2147483652" r:id="R53e5871a91954bdb"/>
+    <p:sldLayoutId xmlns:r="http://schemas.openxmlformats.org/officeDocument/2006/relationships" id="2147483653" r:id="R2567f55d0914498b"/>
   </p:sldLayoutIdLst>
 </p:sldMaster>
 </file>

--- a/tests/OfficeAgent.Tests/Corpus/v1.0.0/native/inputs/p-fill.pptx
+++ b/tests/OfficeAgent.Tests/Corpus/v1.0.0/native/inputs/p-fill.pptx
@@ -2,10 +2,10 @@
 <file path=ppt/presentation.xml><?xml version="1.0" encoding="utf-8"?>
 <p:presentation xmlns:r="http://schemas.openxmlformats.org/officeDocument/2006/relationships" xmlns:p="http://schemas.openxmlformats.org/presentationml/2006/main">
   <p:sldMasterIdLst>
-    <p:sldMasterId xmlns:r="http://schemas.openxmlformats.org/officeDocument/2006/relationships" id="2147483648" r:id="Re5c4962a5193466e"/>
+    <p:sldMasterId xmlns:r="http://schemas.openxmlformats.org/officeDocument/2006/relationships" id="2147483648" r:id="R35535d2586094916"/>
   </p:sldMasterIdLst>
   <p:sldIdLst>
-    <p:sldId xmlns:r="http://schemas.openxmlformats.org/officeDocument/2006/relationships" id="256" r:id="Rb25982c38edd4f53"/>
+    <p:sldId xmlns:r="http://schemas.openxmlformats.org/officeDocument/2006/relationships" id="256" r:id="Rd4e59246b5014d60"/>
   </p:sldIdLst>
   <p:sldSz cx="12192000" cy="6858000"/>
   <p:notesSz cx="6858000" cy="9144000"/>
@@ -386,11 +386,11 @@
   </p:cSld>
   <p:clrMap bg1="lt1" tx1="dk1" bg2="lt2" tx2="dk2" accent1="accent1" accent2="accent2" accent3="accent3" accent4="accent4" accent5="accent5" accent6="accent6" hlink="hlink" folHlink="folHlink"/>
   <p:sldLayoutIdLst>
-    <p:sldLayoutId xmlns:r="http://schemas.openxmlformats.org/officeDocument/2006/relationships" id="2147483649" r:id="R97af01140d34447e"/>
-    <p:sldLayoutId xmlns:r="http://schemas.openxmlformats.org/officeDocument/2006/relationships" id="2147483650" r:id="R2374b71be84949ba"/>
-    <p:sldLayoutId xmlns:r="http://schemas.openxmlformats.org/officeDocument/2006/relationships" id="2147483651" r:id="R9b8aed1908754c61"/>
-    <p:sldLayoutId xmlns:r="http://schemas.openxmlformats.org/officeDocument/2006/relationships" id="2147483652" r:id="R53e5871a91954bdb"/>
-    <p:sldLayoutId xmlns:r="http://schemas.openxmlformats.org/officeDocument/2006/relationships" id="2147483653" r:id="R2567f55d0914498b"/>
+    <p:sldLayoutId xmlns:r="http://schemas.openxmlformats.org/officeDocument/2006/relationships" id="2147483649" r:id="Rdc451ed89a524378"/>
+    <p:sldLayoutId xmlns:r="http://schemas.openxmlformats.org/officeDocument/2006/relationships" id="2147483650" r:id="Ra73f31693b084b7f"/>
+    <p:sldLayoutId xmlns:r="http://schemas.openxmlformats.org/officeDocument/2006/relationships" id="2147483651" r:id="R2da4e0ae3cea43d1"/>
+    <p:sldLayoutId xmlns:r="http://schemas.openxmlformats.org/officeDocument/2006/relationships" id="2147483652" r:id="Ra3b1742e439243ce"/>
+    <p:sldLayoutId xmlns:r="http://schemas.openxmlformats.org/officeDocument/2006/relationships" id="2147483653" r:id="Rd633ec9c0bcb4363"/>
   </p:sldLayoutIdLst>
 </p:sldMaster>
 </file>

--- a/tests/OfficeAgent.Tests/Corpus/v1.0.0/native/inputs/p-fill.pptx
+++ b/tests/OfficeAgent.Tests/Corpus/v1.0.0/native/inputs/p-fill.pptx
@@ -2,10 +2,10 @@
 <file path=ppt/presentation.xml><?xml version="1.0" encoding="utf-8"?>
 <p:presentation xmlns:r="http://schemas.openxmlformats.org/officeDocument/2006/relationships" xmlns:p="http://schemas.openxmlformats.org/presentationml/2006/main">
   <p:sldMasterIdLst>
-    <p:sldMasterId xmlns:r="http://schemas.openxmlformats.org/officeDocument/2006/relationships" id="2147483648" r:id="R35535d2586094916"/>
+    <p:sldMasterId xmlns:r="http://schemas.openxmlformats.org/officeDocument/2006/relationships" id="2147483648" r:id="R9d9f4a0d127149c9"/>
   </p:sldMasterIdLst>
   <p:sldIdLst>
-    <p:sldId xmlns:r="http://schemas.openxmlformats.org/officeDocument/2006/relationships" id="256" r:id="Rd4e59246b5014d60"/>
+    <p:sldId xmlns:r="http://schemas.openxmlformats.org/officeDocument/2006/relationships" id="256" r:id="R33b4b371498c4c42"/>
   </p:sldIdLst>
   <p:sldSz cx="12192000" cy="6858000"/>
   <p:notesSz cx="6858000" cy="9144000"/>
@@ -386,11 +386,11 @@
   </p:cSld>
   <p:clrMap bg1="lt1" tx1="dk1" bg2="lt2" tx2="dk2" accent1="accent1" accent2="accent2" accent3="accent3" accent4="accent4" accent5="accent5" accent6="accent6" hlink="hlink" folHlink="folHlink"/>
   <p:sldLayoutIdLst>
-    <p:sldLayoutId xmlns:r="http://schemas.openxmlformats.org/officeDocument/2006/relationships" id="2147483649" r:id="Rdc451ed89a524378"/>
-    <p:sldLayoutId xmlns:r="http://schemas.openxmlformats.org/officeDocument/2006/relationships" id="2147483650" r:id="Ra73f31693b084b7f"/>
-    <p:sldLayoutId xmlns:r="http://schemas.openxmlformats.org/officeDocument/2006/relationships" id="2147483651" r:id="R2da4e0ae3cea43d1"/>
-    <p:sldLayoutId xmlns:r="http://schemas.openxmlformats.org/officeDocument/2006/relationships" id="2147483652" r:id="Ra3b1742e439243ce"/>
-    <p:sldLayoutId xmlns:r="http://schemas.openxmlformats.org/officeDocument/2006/relationships" id="2147483653" r:id="Rd633ec9c0bcb4363"/>
+    <p:sldLayoutId xmlns:r="http://schemas.openxmlformats.org/officeDocument/2006/relationships" id="2147483649" r:id="Rdecbc16b33d04f13"/>
+    <p:sldLayoutId xmlns:r="http://schemas.openxmlformats.org/officeDocument/2006/relationships" id="2147483650" r:id="R0ccfd514424944ae"/>
+    <p:sldLayoutId xmlns:r="http://schemas.openxmlformats.org/officeDocument/2006/relationships" id="2147483651" r:id="Rb3f13e8668964911"/>
+    <p:sldLayoutId xmlns:r="http://schemas.openxmlformats.org/officeDocument/2006/relationships" id="2147483652" r:id="R31d087bf9c164d32"/>
+    <p:sldLayoutId xmlns:r="http://schemas.openxmlformats.org/officeDocument/2006/relationships" id="2147483653" r:id="Ref4abfca5d754008"/>
   </p:sldLayoutIdLst>
 </p:sldMaster>
 </file>

--- a/tests/OfficeAgent.Tests/Corpus/v1.0.0/native/inputs/p-fill.pptx
+++ b/tests/OfficeAgent.Tests/Corpus/v1.0.0/native/inputs/p-fill.pptx
@@ -2,10 +2,10 @@
 <file path=ppt/presentation.xml><?xml version="1.0" encoding="utf-8"?>
 <p:presentation xmlns:r="http://schemas.openxmlformats.org/officeDocument/2006/relationships" xmlns:p="http://schemas.openxmlformats.org/presentationml/2006/main">
   <p:sldMasterIdLst>
-    <p:sldMasterId xmlns:r="http://schemas.openxmlformats.org/officeDocument/2006/relationships" id="2147483648" r:id="R9d9f4a0d127149c9"/>
+    <p:sldMasterId xmlns:r="http://schemas.openxmlformats.org/officeDocument/2006/relationships" id="2147483648" r:id="Re0154ca0a1dd4f1b"/>
   </p:sldMasterIdLst>
   <p:sldIdLst>
-    <p:sldId xmlns:r="http://schemas.openxmlformats.org/officeDocument/2006/relationships" id="256" r:id="R33b4b371498c4c42"/>
+    <p:sldId xmlns:r="http://schemas.openxmlformats.org/officeDocument/2006/relationships" id="256" r:id="Rdd94f11348144ff0"/>
   </p:sldIdLst>
   <p:sldSz cx="12192000" cy="6858000"/>
   <p:notesSz cx="6858000" cy="9144000"/>
@@ -386,11 +386,11 @@
   </p:cSld>
   <p:clrMap bg1="lt1" tx1="dk1" bg2="lt2" tx2="dk2" accent1="accent1" accent2="accent2" accent3="accent3" accent4="accent4" accent5="accent5" accent6="accent6" hlink="hlink" folHlink="folHlink"/>
   <p:sldLayoutIdLst>
-    <p:sldLayoutId xmlns:r="http://schemas.openxmlformats.org/officeDocument/2006/relationships" id="2147483649" r:id="Rdecbc16b33d04f13"/>
-    <p:sldLayoutId xmlns:r="http://schemas.openxmlformats.org/officeDocument/2006/relationships" id="2147483650" r:id="R0ccfd514424944ae"/>
-    <p:sldLayoutId xmlns:r="http://schemas.openxmlformats.org/officeDocument/2006/relationships" id="2147483651" r:id="Rb3f13e8668964911"/>
-    <p:sldLayoutId xmlns:r="http://schemas.openxmlformats.org/officeDocument/2006/relationships" id="2147483652" r:id="R31d087bf9c164d32"/>
-    <p:sldLayoutId xmlns:r="http://schemas.openxmlformats.org/officeDocument/2006/relationships" id="2147483653" r:id="Ref4abfca5d754008"/>
+    <p:sldLayoutId xmlns:r="http://schemas.openxmlformats.org/officeDocument/2006/relationships" id="2147483649" r:id="R9b9a1e8036d04623"/>
+    <p:sldLayoutId xmlns:r="http://schemas.openxmlformats.org/officeDocument/2006/relationships" id="2147483650" r:id="R285dd981002e47da"/>
+    <p:sldLayoutId xmlns:r="http://schemas.openxmlformats.org/officeDocument/2006/relationships" id="2147483651" r:id="Rea078d4cfadb432f"/>
+    <p:sldLayoutId xmlns:r="http://schemas.openxmlformats.org/officeDocument/2006/relationships" id="2147483652" r:id="R6f70837b57a3406c"/>
+    <p:sldLayoutId xmlns:r="http://schemas.openxmlformats.org/officeDocument/2006/relationships" id="2147483653" r:id="R4e431f99a84f4dba"/>
   </p:sldLayoutIdLst>
 </p:sldMaster>
 </file>

--- a/tests/OfficeAgent.Tests/Corpus/v1.0.0/native/inputs/p-fill.pptx
+++ b/tests/OfficeAgent.Tests/Corpus/v1.0.0/native/inputs/p-fill.pptx
@@ -2,10 +2,10 @@
 <file path=ppt/presentation.xml><?xml version="1.0" encoding="utf-8"?>
 <p:presentation xmlns:r="http://schemas.openxmlformats.org/officeDocument/2006/relationships" xmlns:p="http://schemas.openxmlformats.org/presentationml/2006/main">
   <p:sldMasterIdLst>
-    <p:sldMasterId xmlns:r="http://schemas.openxmlformats.org/officeDocument/2006/relationships" id="2147483648" r:id="Re0154ca0a1dd4f1b"/>
+    <p:sldMasterId xmlns:r="http://schemas.openxmlformats.org/officeDocument/2006/relationships" id="2147483648" r:id="R9e5fe4e9c73f4f2e"/>
   </p:sldMasterIdLst>
   <p:sldIdLst>
-    <p:sldId xmlns:r="http://schemas.openxmlformats.org/officeDocument/2006/relationships" id="256" r:id="Rdd94f11348144ff0"/>
+    <p:sldId xmlns:r="http://schemas.openxmlformats.org/officeDocument/2006/relationships" id="256" r:id="Rdfb1aa099f8441ad"/>
   </p:sldIdLst>
   <p:sldSz cx="12192000" cy="6858000"/>
   <p:notesSz cx="6858000" cy="9144000"/>
@@ -13,7 +13,7 @@
 </file>
 
 <file path=ppt/slideLayouts/slideLayout1.xml><?xml version="1.0" encoding="utf-8"?>
-<p:sldLayout xmlns:p="http://schemas.openxmlformats.org/presentationml/2006/main" type="title">
+<p:sldLayout xmlns:a="http://schemas.openxmlformats.org/drawingml/2006/main" xmlns:p="http://schemas.openxmlformats.org/presentationml/2006/main" type="title">
   <p:cSld name="Title Slide">
     <p:spTree>
       <p:nvGrpSpPr>
@@ -91,7 +91,7 @@
 </file>
 
 <file path=ppt/slideLayouts/slideLayout2.xml><?xml version="1.0" encoding="utf-8"?>
-<p:sldLayout xmlns:p="http://schemas.openxmlformats.org/presentationml/2006/main" type="obj">
+<p:sldLayout xmlns:a="http://schemas.openxmlformats.org/drawingml/2006/main" xmlns:p="http://schemas.openxmlformats.org/presentationml/2006/main" type="obj">
   <p:cSld name="Title and Content">
     <p:spTree>
       <p:nvGrpSpPr>
@@ -169,7 +169,7 @@
 </file>
 
 <file path=ppt/slideLayouts/slideLayout3.xml><?xml version="1.0" encoding="utf-8"?>
-<p:sldLayout xmlns:p="http://schemas.openxmlformats.org/presentationml/2006/main" type="secHead">
+<p:sldLayout xmlns:a="http://schemas.openxmlformats.org/drawingml/2006/main" xmlns:p="http://schemas.openxmlformats.org/presentationml/2006/main" type="secHead">
   <p:cSld name="Section Header">
     <p:spTree>
       <p:nvGrpSpPr>
@@ -247,7 +247,7 @@
 </file>
 
 <file path=ppt/slideLayouts/slideLayout4.xml><?xml version="1.0" encoding="utf-8"?>
-<p:sldLayout xmlns:p="http://schemas.openxmlformats.org/presentationml/2006/main" type="titleOnly">
+<p:sldLayout xmlns:a="http://schemas.openxmlformats.org/drawingml/2006/main" xmlns:p="http://schemas.openxmlformats.org/presentationml/2006/main" type="titleOnly">
   <p:cSld name="Title Only">
     <p:spTree>
       <p:nvGrpSpPr>
@@ -295,7 +295,7 @@
 </file>
 
 <file path=ppt/slideLayouts/slideLayout5.xml><?xml version="1.0" encoding="utf-8"?>
-<p:sldLayout xmlns:p="http://schemas.openxmlformats.org/presentationml/2006/main" type="blank">
+<p:sldLayout xmlns:a="http://schemas.openxmlformats.org/drawingml/2006/main" xmlns:p="http://schemas.openxmlformats.org/presentationml/2006/main" type="blank">
   <p:cSld name="Blank">
     <p:spTree>
       <p:nvGrpSpPr>
@@ -313,7 +313,7 @@
 </file>
 
 <file path=ppt/slideMasters/slideMaster1.xml><?xml version="1.0" encoding="utf-8"?>
-<p:sldMaster xmlns:p="http://schemas.openxmlformats.org/presentationml/2006/main">
+<p:sldMaster xmlns:a="http://schemas.openxmlformats.org/drawingml/2006/main" xmlns:r="http://schemas.openxmlformats.org/officeDocument/2006/relationships" xmlns:p="http://schemas.openxmlformats.org/presentationml/2006/main">
   <p:cSld>
     <p:spTree>
       <p:nvGrpSpPr>
@@ -386,11 +386,11 @@
   </p:cSld>
   <p:clrMap bg1="lt1" tx1="dk1" bg2="lt2" tx2="dk2" accent1="accent1" accent2="accent2" accent3="accent3" accent4="accent4" accent5="accent5" accent6="accent6" hlink="hlink" folHlink="folHlink"/>
   <p:sldLayoutIdLst>
-    <p:sldLayoutId xmlns:r="http://schemas.openxmlformats.org/officeDocument/2006/relationships" id="2147483649" r:id="R9b9a1e8036d04623"/>
-    <p:sldLayoutId xmlns:r="http://schemas.openxmlformats.org/officeDocument/2006/relationships" id="2147483650" r:id="R285dd981002e47da"/>
-    <p:sldLayoutId xmlns:r="http://schemas.openxmlformats.org/officeDocument/2006/relationships" id="2147483651" r:id="Rea078d4cfadb432f"/>
-    <p:sldLayoutId xmlns:r="http://schemas.openxmlformats.org/officeDocument/2006/relationships" id="2147483652" r:id="R6f70837b57a3406c"/>
-    <p:sldLayoutId xmlns:r="http://schemas.openxmlformats.org/officeDocument/2006/relationships" id="2147483653" r:id="R4e431f99a84f4dba"/>
+    <p:sldLayoutId xmlns:r="http://schemas.openxmlformats.org/officeDocument/2006/relationships" id="2147483649" r:id="Rd032c6ad717e4d07"/>
+    <p:sldLayoutId xmlns:r="http://schemas.openxmlformats.org/officeDocument/2006/relationships" id="2147483650" r:id="R3987e589bede448c"/>
+    <p:sldLayoutId xmlns:r="http://schemas.openxmlformats.org/officeDocument/2006/relationships" id="2147483651" r:id="R77becffbcb8b471c"/>
+    <p:sldLayoutId xmlns:r="http://schemas.openxmlformats.org/officeDocument/2006/relationships" id="2147483652" r:id="Rdfe9d9b7b0114506"/>
+    <p:sldLayoutId xmlns:r="http://schemas.openxmlformats.org/officeDocument/2006/relationships" id="2147483653" r:id="Rfa10357818c84534"/>
   </p:sldLayoutIdLst>
 </p:sldMaster>
 </file>
